--- a/presentation/emc2026-idetc-demo.pptx
+++ b/presentation/emc2026-idetc-demo.pptx
@@ -1863,14 +1863,14 @@
             <a:pPr algn="ctr"/>
             <a:r>
               <a:rPr lang="en-CA" sz="2000" dirty="0"/>
-              <a:t>[Presenter Name]</a:t>
+              <a:t>Marcus Madsen</a:t>
             </a:r>
             <a:br>
               <a:rPr lang="en-CA" sz="2000" dirty="0"/>
             </a:br>
             <a:r>
               <a:rPr lang="en-CA" sz="2000" dirty="0"/>
-              <a:t>Brigham Young University</a:t>
+              <a:t>Research Assistant</a:t>
             </a:r>
           </a:p>
           <a:p>
@@ -1893,7 +1893,7 @@
             <a:pPr algn="ctr"/>
             <a:r>
               <a:rPr lang="en-CA" sz="2000" dirty="0"/>
-              <a:t>ASME IDETC-CIE 2026 · DAC-10</a:t>
+              <a:t>ASME IDETC-CIE 2026</a:t>
             </a:r>
             <a:br>
               <a:rPr lang="en-CA" sz="2000" dirty="0"/>
